--- a/資料庫_說明文件/b.專案四_所使用的資料表介紹.pptx
+++ b/資料庫_說明文件/b.專案四_所使用的資料表介紹.pptx
@@ -246,7 +246,7 @@
           <a:p>
             <a:fld id="{801CE410-62FA-43F4-B678-62E960EC4E37}" type="datetimeFigureOut">
               <a:rPr lang="zh-TW" altLang="en-US" smtClean="0"/>
-              <a:t>2026/4/11</a:t>
+              <a:t>2026/4/12</a:t>
             </a:fld>
             <a:endParaRPr lang="zh-TW" altLang="en-US"/>
           </a:p>
@@ -416,7 +416,7 @@
           <a:p>
             <a:fld id="{801CE410-62FA-43F4-B678-62E960EC4E37}" type="datetimeFigureOut">
               <a:rPr lang="zh-TW" altLang="en-US" smtClean="0"/>
-              <a:t>2026/4/11</a:t>
+              <a:t>2026/4/12</a:t>
             </a:fld>
             <a:endParaRPr lang="zh-TW" altLang="en-US"/>
           </a:p>
@@ -596,7 +596,7 @@
           <a:p>
             <a:fld id="{801CE410-62FA-43F4-B678-62E960EC4E37}" type="datetimeFigureOut">
               <a:rPr lang="zh-TW" altLang="en-US" smtClean="0"/>
-              <a:t>2026/4/11</a:t>
+              <a:t>2026/4/12</a:t>
             </a:fld>
             <a:endParaRPr lang="zh-TW" altLang="en-US"/>
           </a:p>
@@ -766,7 +766,7 @@
           <a:p>
             <a:fld id="{801CE410-62FA-43F4-B678-62E960EC4E37}" type="datetimeFigureOut">
               <a:rPr lang="zh-TW" altLang="en-US" smtClean="0"/>
-              <a:t>2026/4/11</a:t>
+              <a:t>2026/4/12</a:t>
             </a:fld>
             <a:endParaRPr lang="zh-TW" altLang="en-US"/>
           </a:p>
@@ -1012,7 +1012,7 @@
           <a:p>
             <a:fld id="{801CE410-62FA-43F4-B678-62E960EC4E37}" type="datetimeFigureOut">
               <a:rPr lang="zh-TW" altLang="en-US" smtClean="0"/>
-              <a:t>2026/4/11</a:t>
+              <a:t>2026/4/12</a:t>
             </a:fld>
             <a:endParaRPr lang="zh-TW" altLang="en-US"/>
           </a:p>
@@ -1244,7 +1244,7 @@
           <a:p>
             <a:fld id="{801CE410-62FA-43F4-B678-62E960EC4E37}" type="datetimeFigureOut">
               <a:rPr lang="zh-TW" altLang="en-US" smtClean="0"/>
-              <a:t>2026/4/11</a:t>
+              <a:t>2026/4/12</a:t>
             </a:fld>
             <a:endParaRPr lang="zh-TW" altLang="en-US"/>
           </a:p>
@@ -1611,7 +1611,7 @@
           <a:p>
             <a:fld id="{801CE410-62FA-43F4-B678-62E960EC4E37}" type="datetimeFigureOut">
               <a:rPr lang="zh-TW" altLang="en-US" smtClean="0"/>
-              <a:t>2026/4/11</a:t>
+              <a:t>2026/4/12</a:t>
             </a:fld>
             <a:endParaRPr lang="zh-TW" altLang="en-US"/>
           </a:p>
@@ -1729,7 +1729,7 @@
           <a:p>
             <a:fld id="{801CE410-62FA-43F4-B678-62E960EC4E37}" type="datetimeFigureOut">
               <a:rPr lang="zh-TW" altLang="en-US" smtClean="0"/>
-              <a:t>2026/4/11</a:t>
+              <a:t>2026/4/12</a:t>
             </a:fld>
             <a:endParaRPr lang="zh-TW" altLang="en-US"/>
           </a:p>
@@ -1824,7 +1824,7 @@
           <a:p>
             <a:fld id="{801CE410-62FA-43F4-B678-62E960EC4E37}" type="datetimeFigureOut">
               <a:rPr lang="zh-TW" altLang="en-US" smtClean="0"/>
-              <a:t>2026/4/11</a:t>
+              <a:t>2026/4/12</a:t>
             </a:fld>
             <a:endParaRPr lang="zh-TW" altLang="en-US"/>
           </a:p>
@@ -2101,7 +2101,7 @@
           <a:p>
             <a:fld id="{801CE410-62FA-43F4-B678-62E960EC4E37}" type="datetimeFigureOut">
               <a:rPr lang="zh-TW" altLang="en-US" smtClean="0"/>
-              <a:t>2026/4/11</a:t>
+              <a:t>2026/4/12</a:t>
             </a:fld>
             <a:endParaRPr lang="zh-TW" altLang="en-US"/>
           </a:p>
@@ -2354,7 +2354,7 @@
           <a:p>
             <a:fld id="{801CE410-62FA-43F4-B678-62E960EC4E37}" type="datetimeFigureOut">
               <a:rPr lang="zh-TW" altLang="en-US" smtClean="0"/>
-              <a:t>2026/4/11</a:t>
+              <a:t>2026/4/12</a:t>
             </a:fld>
             <a:endParaRPr lang="zh-TW" altLang="en-US"/>
           </a:p>
@@ -2567,7 +2567,7 @@
           <a:p>
             <a:fld id="{801CE410-62FA-43F4-B678-62E960EC4E37}" type="datetimeFigureOut">
               <a:rPr lang="zh-TW" altLang="en-US" smtClean="0"/>
-              <a:t>2026/4/11</a:t>
+              <a:t>2026/4/12</a:t>
             </a:fld>
             <a:endParaRPr lang="zh-TW" altLang="en-US"/>
           </a:p>
@@ -7584,17 +7584,7 @@
                 <a:latin typeface="標楷體" panose="03000509000000000000" pitchFamily="65" charset="-120"/>
                 <a:ea typeface="標楷體" panose="03000509000000000000" pitchFamily="65" charset="-120"/>
               </a:rPr>
-              <a:t>貨主</a:t>
-            </a:r>
-            <a:r>
-              <a:rPr lang="zh-TW" altLang="en-US" dirty="0" smtClean="0">
-                <a:solidFill>
-                  <a:schemeClr val="tx1"/>
-                </a:solidFill>
-                <a:latin typeface="標楷體" panose="03000509000000000000" pitchFamily="65" charset="-120"/>
-                <a:ea typeface="標楷體" panose="03000509000000000000" pitchFamily="65" charset="-120"/>
-              </a:rPr>
-              <a:t>檔  </a:t>
+              <a:t>貨主檔  </a:t>
             </a:r>
             <a:r>
               <a:rPr lang="en-US" altLang="zh-TW" dirty="0" err="1" smtClean="0">
@@ -7673,17 +7663,7 @@
                 <a:latin typeface="標楷體" panose="03000509000000000000" pitchFamily="65" charset="-120"/>
                 <a:ea typeface="標楷體" panose="03000509000000000000" pitchFamily="65" charset="-120"/>
               </a:rPr>
-              <a:t>貨</a:t>
-            </a:r>
-            <a:r>
-              <a:rPr lang="zh-TW" altLang="en-US" dirty="0" smtClean="0">
-                <a:solidFill>
-                  <a:schemeClr val="tx1"/>
-                </a:solidFill>
-                <a:latin typeface="標楷體" panose="03000509000000000000" pitchFamily="65" charset="-120"/>
-                <a:ea typeface="標楷體" panose="03000509000000000000" pitchFamily="65" charset="-120"/>
-              </a:rPr>
-              <a:t>明細檔  </a:t>
+              <a:t>貨明細檔  </a:t>
             </a:r>
             <a:r>
               <a:rPr lang="en-US" altLang="zh-TW" dirty="0" err="1" smtClean="0">
